--- a/media/exports/reports/2026-04/growth-trades.pptx
+++ b/media/exports/reports/2026-04/growth-trades.pptx
@@ -231,61 +231,61 @@
                 <c:formatCode>$#,##0;[Red]($#,##0);"-"</c:formatCode>
                 <c:ptCount val="19"/>
                 <c:pt idx="0">
-                  <c:v>171009</c:v>
+                  <c:v>191014</c:v>
                 </c:pt>
                 <c:pt idx="1">
-                  <c:v>179474</c:v>
+                  <c:v>200124</c:v>
                 </c:pt>
                 <c:pt idx="2">
-                  <c:v>143156</c:v>
+                  <c:v>159406</c:v>
                 </c:pt>
                 <c:pt idx="3">
-                  <c:v>140909</c:v>
+                  <c:v>156794</c:v>
                 </c:pt>
                 <c:pt idx="4">
-                  <c:v>160943</c:v>
+                  <c:v>179190</c:v>
                 </c:pt>
                 <c:pt idx="5">
-                  <c:v>135082</c:v>
+                  <c:v>150465</c:v>
                 </c:pt>
                 <c:pt idx="6">
-                  <c:v>124705</c:v>
+                  <c:v>138865</c:v>
                 </c:pt>
                 <c:pt idx="7">
-                  <c:v>129816</c:v>
+                  <c:v>144649</c:v>
                 </c:pt>
                 <c:pt idx="8">
-                  <c:v>164113</c:v>
+                  <c:v>183265</c:v>
                 </c:pt>
                 <c:pt idx="9">
-                  <c:v>186760</c:v>
+                  <c:v>208588</c:v>
                 </c:pt>
                 <c:pt idx="10">
-                  <c:v>139164</c:v>
+                  <c:v>155118</c:v>
                 </c:pt>
                 <c:pt idx="11">
-                  <c:v>128255</c:v>
+                  <c:v>143077</c:v>
                 </c:pt>
                 <c:pt idx="12">
-                  <c:v>128898</c:v>
+                  <c:v>143566</c:v>
                 </c:pt>
                 <c:pt idx="13">
-                  <c:v>174786</c:v>
+                  <c:v>194966</c:v>
                 </c:pt>
                 <c:pt idx="14">
-                  <c:v>135079</c:v>
+                  <c:v>150283</c:v>
                 </c:pt>
                 <c:pt idx="15">
-                  <c:v>164780</c:v>
+                  <c:v>183306</c:v>
                 </c:pt>
                 <c:pt idx="16">
-                  <c:v>196372</c:v>
+                  <c:v>218908</c:v>
                 </c:pt>
                 <c:pt idx="17">
-                  <c:v>191500</c:v>
+                  <c:v>213578</c:v>
                 </c:pt>
                 <c:pt idx="18">
-                  <c:v>164987</c:v>
+                  <c:v>183967</c:v>
                 </c:pt>
               </c:numCache>
             </c:numRef>
@@ -513,61 +513,61 @@
                 <c:formatCode>$#,##0;[Red]($#,##0);"-"</c:formatCode>
                 <c:ptCount val="19"/>
                 <c:pt idx="0">
-                  <c:v>24670</c:v>
+                  <c:v>27650</c:v>
                 </c:pt>
                 <c:pt idx="1">
-                  <c:v>24670</c:v>
+                  <c:v>27650</c:v>
                 </c:pt>
                 <c:pt idx="2">
-                  <c:v>24670</c:v>
+                  <c:v>27650</c:v>
                 </c:pt>
                 <c:pt idx="3">
-                  <c:v>24670</c:v>
+                  <c:v>27650</c:v>
                 </c:pt>
                 <c:pt idx="4">
-                  <c:v>27930</c:v>
+                  <c:v>31300</c:v>
                 </c:pt>
                 <c:pt idx="5">
-                  <c:v>27930</c:v>
+                  <c:v>31300</c:v>
                 </c:pt>
                 <c:pt idx="6">
-                  <c:v>27930</c:v>
+                  <c:v>31300</c:v>
                 </c:pt>
                 <c:pt idx="7">
-                  <c:v>27930</c:v>
+                  <c:v>31300</c:v>
                 </c:pt>
                 <c:pt idx="8">
-                  <c:v>31870</c:v>
+                  <c:v>35720</c:v>
                 </c:pt>
                 <c:pt idx="9">
-                  <c:v>33200</c:v>
+                  <c:v>37200</c:v>
                 </c:pt>
                 <c:pt idx="10">
-                  <c:v>33200</c:v>
+                  <c:v>37200</c:v>
                 </c:pt>
                 <c:pt idx="11">
-                  <c:v>33200</c:v>
+                  <c:v>37200</c:v>
                 </c:pt>
                 <c:pt idx="12">
-                  <c:v>35800</c:v>
+                  <c:v>40100</c:v>
                 </c:pt>
                 <c:pt idx="13">
-                  <c:v>35800</c:v>
+                  <c:v>40100</c:v>
                 </c:pt>
                 <c:pt idx="14">
-                  <c:v>35800</c:v>
+                  <c:v>40100</c:v>
                 </c:pt>
                 <c:pt idx="15">
-                  <c:v>35800</c:v>
+                  <c:v>40100</c:v>
                 </c:pt>
                 <c:pt idx="16">
-                  <c:v>37500</c:v>
+                  <c:v>42000</c:v>
                 </c:pt>
                 <c:pt idx="17">
-                  <c:v>37500</c:v>
+                  <c:v>42000</c:v>
                 </c:pt>
                 <c:pt idx="18">
-                  <c:v>37500</c:v>
+                  <c:v>42000</c:v>
                 </c:pt>
               </c:numCache>
             </c:numRef>
@@ -616,7 +616,7 @@
         <c:axId val="-2100718248"/>
         <c:scaling>
           <c:orientation val="minMax"/>
-          <c:max val="40000.0"/>
+          <c:max val="50000.0"/>
           <c:min val="0.0"/>
         </c:scaling>
         <c:delete val="0"/>
@@ -795,61 +795,61 @@
                 <c:formatCode>$#,##0;[Red]($#,##0);"-"</c:formatCode>
                 <c:ptCount val="19"/>
                 <c:pt idx="0">
+                  <c:v>141600</c:v>
+                </c:pt>
+                <c:pt idx="1">
+                  <c:v>147100</c:v>
+                </c:pt>
+                <c:pt idx="2">
+                  <c:v>103700</c:v>
+                </c:pt>
+                <c:pt idx="3">
+                  <c:v>100100</c:v>
+                </c:pt>
+                <c:pt idx="4">
+                  <c:v>118600</c:v>
+                </c:pt>
+                <c:pt idx="5">
+                  <c:v>96400</c:v>
+                </c:pt>
+                <c:pt idx="6">
+                  <c:v>83900</c:v>
+                </c:pt>
+                <c:pt idx="7">
+                  <c:v>89900</c:v>
+                </c:pt>
+                <c:pt idx="8">
                   <c:v>126300</c:v>
                 </c:pt>
-                <c:pt idx="1">
-                  <c:v>131400</c:v>
-                </c:pt>
-                <c:pt idx="2">
-                  <c:v>92600</c:v>
-                </c:pt>
-                <c:pt idx="3">
-                  <c:v>89400</c:v>
-                </c:pt>
-                <c:pt idx="4">
-                  <c:v>106000</c:v>
-                </c:pt>
-                <c:pt idx="5">
-                  <c:v>86100</c:v>
-                </c:pt>
-                <c:pt idx="6">
-                  <c:v>74900</c:v>
-                </c:pt>
-                <c:pt idx="7">
-                  <c:v>80300</c:v>
-                </c:pt>
-                <c:pt idx="8">
-                  <c:v>112700</c:v>
-                </c:pt>
                 <c:pt idx="9">
-                  <c:v>135800</c:v>
+                  <c:v>152100</c:v>
                 </c:pt>
                 <c:pt idx="10">
-                  <c:v>86200</c:v>
+                  <c:v>96500</c:v>
                 </c:pt>
                 <c:pt idx="11">
-                  <c:v>75100</c:v>
+                  <c:v>84200</c:v>
                 </c:pt>
                 <c:pt idx="12">
-                  <c:v>70800</c:v>
+                  <c:v>79300</c:v>
                 </c:pt>
                 <c:pt idx="13">
-                  <c:v>113300</c:v>
+                  <c:v>126900</c:v>
                 </c:pt>
                 <c:pt idx="14">
-                  <c:v>69700</c:v>
+                  <c:v>78100</c:v>
                 </c:pt>
                 <c:pt idx="15">
-                  <c:v>97500</c:v>
+                  <c:v>109100</c:v>
                 </c:pt>
                 <c:pt idx="16">
-                  <c:v>129300</c:v>
+                  <c:v>144800</c:v>
                 </c:pt>
                 <c:pt idx="17">
-                  <c:v>129400</c:v>
+                  <c:v>144900</c:v>
                 </c:pt>
                 <c:pt idx="18">
-                  <c:v>104400</c:v>
+                  <c:v>116900</c:v>
                 </c:pt>
               </c:numCache>
             </c:numRef>
@@ -898,7 +898,7 @@
         <c:axId val="-2100718248"/>
         <c:scaling>
           <c:orientation val="minMax"/>
-          <c:max val="150000.0"/>
+          <c:max val="200000.0"/>
           <c:min val="0.0"/>
         </c:scaling>
         <c:delete val="0"/>
@@ -1077,61 +1077,61 @@
                 <c:formatCode>$#,##0;[Red]($#,##0);"-"</c:formatCode>
                 <c:ptCount val="19"/>
                 <c:pt idx="0">
-                  <c:v>20039</c:v>
+                  <c:v>21764</c:v>
                 </c:pt>
                 <c:pt idx="1">
-                  <c:v>23404</c:v>
+                  <c:v>25374</c:v>
                 </c:pt>
                 <c:pt idx="2">
-                  <c:v>25886</c:v>
+                  <c:v>28056</c:v>
                 </c:pt>
                 <c:pt idx="3">
-                  <c:v>26839</c:v>
+                  <c:v>29044</c:v>
                 </c:pt>
                 <c:pt idx="4">
-                  <c:v>27013</c:v>
+                  <c:v>29290</c:v>
                 </c:pt>
                 <c:pt idx="5">
-                  <c:v>21052</c:v>
+                  <c:v>22765</c:v>
                 </c:pt>
                 <c:pt idx="6">
-                  <c:v>21875</c:v>
+                  <c:v>23665</c:v>
                 </c:pt>
                 <c:pt idx="7">
-                  <c:v>21586</c:v>
+                  <c:v>23449</c:v>
                 </c:pt>
                 <c:pt idx="8">
-                  <c:v>19543</c:v>
+                  <c:v>21245</c:v>
                 </c:pt>
                 <c:pt idx="9">
-                  <c:v>17760</c:v>
+                  <c:v>19288</c:v>
                 </c:pt>
                 <c:pt idx="10">
-                  <c:v>19764</c:v>
+                  <c:v>21418</c:v>
                 </c:pt>
                 <c:pt idx="11">
-                  <c:v>19955</c:v>
+                  <c:v>21677</c:v>
                 </c:pt>
                 <c:pt idx="12">
-                  <c:v>22298</c:v>
+                  <c:v>24166</c:v>
                 </c:pt>
                 <c:pt idx="13">
-                  <c:v>25686</c:v>
+                  <c:v>27966</c:v>
                 </c:pt>
                 <c:pt idx="14">
-                  <c:v>29579</c:v>
+                  <c:v>32083</c:v>
                 </c:pt>
                 <c:pt idx="15">
-                  <c:v>31480</c:v>
+                  <c:v>34106</c:v>
                 </c:pt>
                 <c:pt idx="16">
-                  <c:v>29572</c:v>
+                  <c:v>32108</c:v>
                 </c:pt>
                 <c:pt idx="17">
-                  <c:v>24600</c:v>
+                  <c:v>26678</c:v>
                 </c:pt>
                 <c:pt idx="18">
-                  <c:v>23087</c:v>
+                  <c:v>25067</c:v>
                 </c:pt>
               </c:numCache>
             </c:numRef>
@@ -1705,7 +1705,7 @@
           <a:lstStyle/>
           <a:p>
             <a:r>
-              <a:t>Trades · All. April against April last year: 32.3%; Year to date (Jul to Apr 2026): $1,610,581; Gross margin, year to date: 37.6%. Revenue is $1,610,581 this financial year to date (Jul to Apr 2026). Maintenance contracts make the highest gross margin (59.5%); Installations the lowest (28.4%). The business needs 39.8% gross margin just to cover overheads. Installations: 28.4% gross margin, 6.6 points under the 35.0% target: about $66,763 on $1,011,500 of revenue this financial year to date. It's below the 39.8% needed to cover overheads, too. Maintenance contracts: 59.5% gross margin, 24.5 points over the 35.0% target ($87,069 ahead on $355,300 this financial year to date).</a:t>
+              <a:t>Trades · All. April against April last year: 32.5%; Year to date (Jul to Apr 2026): $1,795,357; Gross margin, year to date: 44.0%. Revenue is $1,795,357 this financial year to date (Jul to Apr 2026). Maintenance contracts make the highest gross margin (63.9%); Installations the lowest (36.1%). The business needs 45.4% gross margin just to cover overheads. Installations: 36.1% gross margin, 1.1 points over the 35.0% target ($12,082 ahead on $1,132,800 this financial year to date). Maintenance contracts: 63.9% gross margin, 28.9 points over the 35.0% target ($114,824 ahead on $398,000 this financial year to date).</a:t>
             </a:r>
           </a:p>
         </p:txBody>
@@ -1775,7 +1775,7 @@
           <a:lstStyle/>
           <a:p>
             <a:r>
-              <a:t>Trades · Maintenance contracts. April against April last year: 34.3%; Year to date (Jul to Apr 2026): $355,300; Gross margin, year to date: 59.5%. Maintenance contracts brought in $355,300 this financial year to date, at a 59.5% gross margin (above the 37.6% overall). Maintenance contracts: 59.5% gross margin, 24.5 points over the 35.0% target ($87,069 ahead on $355,300 this financial year to date).</a:t>
+              <a:t>Trades · Maintenance contracts. April against April last year: 34.2%; Year to date (Jul to Apr 2026): $398,000; Gross margin, year to date: 63.9%. Maintenance contracts brought in $398,000 this financial year to date, at a 63.9% gross margin (above the 44.0% overall). Maintenance contracts: 63.9% gross margin, 28.9 points over the 35.0% target ($114,824 ahead on $398,000 this financial year to date).</a:t>
             </a:r>
           </a:p>
         </p:txBody>
@@ -1845,7 +1845,7 @@
           <a:lstStyle/>
           <a:p>
             <a:r>
-              <a:t>Trades · Installations. April against April last year: 39.4%; Year to date (Jul to Apr 2026): $1,011,500; Gross margin, year to date: 28.4%. Installations brought in $1,011,500 this financial year to date, at a 28.4% gross margin (below the 37.6% overall). Installations: 28.4% gross margin, 6.6 points under the 35.0% target: about $66,763 on $1,011,500 of revenue this financial year to date. It's below the 39.8% needed to cover overheads, too.</a:t>
+              <a:t>Trades · Installations. April against April last year: 39.3%; Year to date (Jul to Apr 2026): $1,132,800; Gross margin, year to date: 36.1%. Installations brought in $1,132,800 this financial year to date, at a 36.1% gross margin (below the 44.0% overall). Installations: 36.1% gross margin, 1.1 points over the 35.0% target ($12,082 ahead on $1,132,800 this financial year to date).</a:t>
             </a:r>
           </a:p>
         </p:txBody>
@@ -1915,7 +1915,7 @@
           <a:lstStyle/>
           <a:p>
             <a:r>
-              <a:t>Trades · Call-outs and repairs. April against April last year: 5.5%; Year to date (Jul to Apr 2026): $243,781; Gross margin, year to date: 43.7%. Call-outs and repairs brought in $243,781 this financial year to date, at a 43.7% gross margin (above the 37.6% overall). Call-outs and repairs: 43.7% gross margin, 8.7 points over the 35.0% target ($21,176 ahead on $243,781 this financial year to date).</a:t>
+              <a:t>Trades · Call-outs and repairs. April against April last year: 5.9%; Year to date (Jul to Apr 2026): $264,557; Gross margin, year to date: 48.1%. Call-outs and repairs brought in $264,557 this financial year to date, at a 48.1% gross margin (above the 44.0% overall). Call-outs and repairs: 48.1% gross margin, 13.1 points over the 35.0% target ($34,680 ahead on $264,557 this financial year to date).</a:t>
             </a:r>
           </a:p>
         </p:txBody>
@@ -1985,7 +1985,7 @@
           <a:lstStyle/>
           <a:p>
             <a:r>
-              <a:t>By line: financial year to date (Jul to Apr 2026) against the same period last year · Trades. Same period last year: Not available: the data starts October 2024. From gross margin to profit: April's jobs made $68,843 gross margin (41.7%). Technician time not charged to jobs took $6,456 and overheads $59,290, leaving $3,097 profit before tax (1.9% of revenue). To cover overheads, jobs need a 39.8% gross margin on average.</a:t>
+              <a:t>By line: financial year to date (Jul to Apr 2026) against the same period last year · Trades. Same period last year: Not available: the data starts October 2024. From gross margin to profit: April's jobs made $87,823 gross margin (47.7%). Technician time not charged to jobs took $24,208 and overheads $59,290, leaving $4,325 profit before tax (2.4% of revenue). To cover overheads, jobs need a 45.4% gross margin on average.</a:t>
             </a:r>
           </a:p>
         </p:txBody>
@@ -5400,7 +5400,7 @@
                 </a:solidFill>
                 <a:latin typeface="Roboto"/>
               </a:rPr>
-              <a:t>Data retrieved 2pm, Tue 6 Oct 2026 · Generated 8 Oct 2026, 9:35am · Sample data · Made with Python (python-pptx)</a:t>
+              <a:t>Data retrieved 2pm, Tue 6 Oct 2026 · Generated 9 Oct 2026, 8:41am · Sample data · Made with Python (python-pptx)</a:t>
             </a:r>
           </a:p>
         </p:txBody>
@@ -5746,7 +5746,7 @@
                 </a:solidFill>
                 <a:latin typeface="Roboto"/>
               </a:rPr>
-              <a:t>32.3%</a:t>
+              <a:t>32.5%</a:t>
             </a:r>
           </a:p>
         </p:txBody>
@@ -5785,7 +5785,7 @@
                 </a:solidFill>
                 <a:latin typeface="Roboto"/>
               </a:rPr>
-              <a:t>$164,987 against $124,705</a:t>
+              <a:t>$183,967 against $138,865</a:t>
             </a:r>
           </a:p>
         </p:txBody>
@@ -5912,7 +5912,7 @@
                 </a:solidFill>
                 <a:latin typeface="Roboto"/>
               </a:rPr>
-              <a:t>$1,610,581</a:t>
+              <a:t>$1,795,357</a:t>
             </a:r>
           </a:p>
         </p:txBody>
@@ -6078,7 +6078,7 @@
                 </a:solidFill>
                 <a:latin typeface="Roboto"/>
               </a:rPr>
-              <a:t>37.6%</a:t>
+              <a:t>44.0%</a:t>
             </a:r>
           </a:p>
         </p:txBody>
@@ -6117,7 +6117,7 @@
                 </a:solidFill>
                 <a:latin typeface="Roboto"/>
               </a:rPr>
-              <a:t>$605,185 before overheads</a:t>
+              <a:t>$789,961 before overheads</a:t>
             </a:r>
           </a:p>
         </p:txBody>
@@ -6132,7 +6132,7 @@
         </p:nvGraphicFramePr>
         <p:xfrm>
           <a:off x="457200" y="2604516"/>
-          <a:ext cx="11277295" cy="2119884"/>
+          <a:ext cx="11277295" cy="2318004"/>
         </p:xfrm>
         <a:graphic>
           <a:graphicData uri="http://schemas.openxmlformats.org/drawingml/2006/chart">
@@ -6148,8 +6148,8 @@
         </p:nvSpPr>
         <p:spPr>
           <a:xfrm>
-            <a:off x="457200" y="4815840"/>
-            <a:ext cx="5501487" cy="1493520"/>
+            <a:off x="457200" y="5013960"/>
+            <a:ext cx="5501487" cy="1295400"/>
           </a:xfrm>
           <a:prstGeom prst="rect">
             <a:avLst/>
@@ -6197,7 +6197,7 @@
         </p:nvSpPr>
         <p:spPr>
           <a:xfrm>
-            <a:off x="594360" y="4870704"/>
+            <a:off x="594360" y="5068824"/>
             <a:ext cx="5227167" cy="274320"/>
           </a:xfrm>
           <a:prstGeom prst="rect">
@@ -6236,8 +6236,8 @@
         </p:nvSpPr>
         <p:spPr>
           <a:xfrm>
-            <a:off x="594360" y="5145024"/>
-            <a:ext cx="5227167" cy="1127760"/>
+            <a:off x="594360" y="5343144"/>
+            <a:ext cx="5227167" cy="929640"/>
           </a:xfrm>
           <a:prstGeom prst="rect">
             <a:avLst/>
@@ -6262,7 +6262,7 @@
                 </a:solidFill>
                 <a:latin typeface="Roboto"/>
               </a:rPr>
-              <a:t>Revenue is $1,610,581 this financial year to date (Jul to Apr 2026). Maintenance contracts make the highest gross margin (59.5%); Installations the lowest (28.4%). The business needs 39.8% gross margin just to cover overheads.</a:t>
+              <a:t>Revenue is $1,795,357 this financial year to date (Jul to Apr 2026). Maintenance contracts make the highest gross margin (63.9%); Installations the lowest (36.1%). The business needs 45.4% gross margin just to cover overheads.</a:t>
             </a:r>
           </a:p>
         </p:txBody>
@@ -6275,8 +6275,8 @@
         </p:nvSpPr>
         <p:spPr>
           <a:xfrm>
-            <a:off x="6233007" y="4815840"/>
-            <a:ext cx="5501487" cy="1493520"/>
+            <a:off x="6233007" y="5013960"/>
+            <a:ext cx="5501487" cy="1295400"/>
           </a:xfrm>
           <a:prstGeom prst="rect">
             <a:avLst/>
@@ -6324,7 +6324,7 @@
         </p:nvSpPr>
         <p:spPr>
           <a:xfrm>
-            <a:off x="6370167" y="4870704"/>
+            <a:off x="6370167" y="5068824"/>
             <a:ext cx="5227167" cy="274320"/>
           </a:xfrm>
           <a:prstGeom prst="rect">
@@ -6363,8 +6363,8 @@
         </p:nvSpPr>
         <p:spPr>
           <a:xfrm>
-            <a:off x="6370167" y="5145024"/>
-            <a:ext cx="5227167" cy="1127760"/>
+            <a:off x="6370167" y="5343144"/>
+            <a:ext cx="5227167" cy="929640"/>
           </a:xfrm>
           <a:prstGeom prst="rect">
             <a:avLst/>
@@ -6389,7 +6389,7 @@
                 </a:solidFill>
                 <a:latin typeface="Roboto"/>
               </a:rPr>
-              <a:t>Installations: 28.4% gross margin, 6.6 points under the 35.0% target: about $66,763 on $1,011,500 of revenue this financial year to date. It's below the 39.8% needed to cover overheads, too. Maintenance contracts: 59.5% gross margin, 24.5 points over the 35.0% target ($87,069 ahead on $355,300 this financial year to date).</a:t>
+              <a:t>Installations: 36.1% gross margin, 1.1 points over the 35.0% target ($12,082 ahead on $1,132,800 this financial year to date). Maintenance contracts: 63.9% gross margin, 28.9 points over the 35.0% target ($114,824 ahead on $398,000 this financial year to date).</a:t>
             </a:r>
           </a:p>
         </p:txBody>
@@ -6467,7 +6467,7 @@
                 </a:solidFill>
                 <a:latin typeface="Roboto"/>
               </a:rPr>
-              <a:t>Data retrieved 2pm, Tue 6 Oct 2026 · Generated 8 Oct 2026, 9:35am · Sample data · Made with Python (python-pptx)</a:t>
+              <a:t>Data retrieved 2pm, Tue 6 Oct 2026 · Generated 9 Oct 2026, 8:41am · Sample data · Made with Python (python-pptx)</a:t>
             </a:r>
           </a:p>
         </p:txBody>
@@ -6813,7 +6813,7 @@
                 </a:solidFill>
                 <a:latin typeface="Roboto"/>
               </a:rPr>
-              <a:t>34.3%</a:t>
+              <a:t>34.2%</a:t>
             </a:r>
           </a:p>
         </p:txBody>
@@ -6852,7 +6852,7 @@
                 </a:solidFill>
                 <a:latin typeface="Roboto"/>
               </a:rPr>
-              <a:t>$37,500 against $27,930</a:t>
+              <a:t>$42,000 against $31,300</a:t>
             </a:r>
           </a:p>
         </p:txBody>
@@ -6979,7 +6979,7 @@
                 </a:solidFill>
                 <a:latin typeface="Roboto"/>
               </a:rPr>
-              <a:t>$355,300</a:t>
+              <a:t>$398,000</a:t>
             </a:r>
           </a:p>
         </p:txBody>
@@ -7145,7 +7145,7 @@
                 </a:solidFill>
                 <a:latin typeface="Roboto"/>
               </a:rPr>
-              <a:t>59.5%</a:t>
+              <a:t>63.9%</a:t>
             </a:r>
           </a:p>
         </p:txBody>
@@ -7184,7 +7184,7 @@
                 </a:solidFill>
                 <a:latin typeface="Roboto"/>
               </a:rPr>
-              <a:t>$211,424 before overheads</a:t>
+              <a:t>$254,124 before overheads</a:t>
             </a:r>
           </a:p>
         </p:txBody>
@@ -7329,7 +7329,7 @@
                 </a:solidFill>
                 <a:latin typeface="Roboto"/>
               </a:rPr>
-              <a:t>Maintenance contracts brought in $355,300 this financial year to date, at a 59.5% gross margin (above the 37.6% overall).</a:t>
+              <a:t>Maintenance contracts brought in $398,000 this financial year to date, at a 63.9% gross margin (above the 44.0% overall).</a:t>
             </a:r>
           </a:p>
         </p:txBody>
@@ -7456,7 +7456,7 @@
                 </a:solidFill>
                 <a:latin typeface="Roboto"/>
               </a:rPr>
-              <a:t>Maintenance contracts: 59.5% gross margin, 24.5 points over the 35.0% target ($87,069 ahead on $355,300 this financial year to date).</a:t>
+              <a:t>Maintenance contracts: 63.9% gross margin, 28.9 points over the 35.0% target ($114,824 ahead on $398,000 this financial year to date).</a:t>
             </a:r>
           </a:p>
         </p:txBody>
@@ -7534,7 +7534,7 @@
                 </a:solidFill>
                 <a:latin typeface="Roboto"/>
               </a:rPr>
-              <a:t>Data retrieved 2pm, Tue 6 Oct 2026 · Generated 8 Oct 2026, 9:35am · Sample data · Made with Python (python-pptx)</a:t>
+              <a:t>Data retrieved 2pm, Tue 6 Oct 2026 · Generated 9 Oct 2026, 8:41am · Sample data · Made with Python (python-pptx)</a:t>
             </a:r>
           </a:p>
         </p:txBody>
@@ -7880,7 +7880,7 @@
                 </a:solidFill>
                 <a:latin typeface="Roboto"/>
               </a:rPr>
-              <a:t>39.4%</a:t>
+              <a:t>39.3%</a:t>
             </a:r>
           </a:p>
         </p:txBody>
@@ -7919,7 +7919,7 @@
                 </a:solidFill>
                 <a:latin typeface="Roboto"/>
               </a:rPr>
-              <a:t>$104,400 against $74,900</a:t>
+              <a:t>$116,900 against $83,900</a:t>
             </a:r>
           </a:p>
         </p:txBody>
@@ -8046,7 +8046,7 @@
                 </a:solidFill>
                 <a:latin typeface="Roboto"/>
               </a:rPr>
-              <a:t>$1,011,500</a:t>
+              <a:t>$1,132,800</a:t>
             </a:r>
           </a:p>
         </p:txBody>
@@ -8212,7 +8212,7 @@
                 </a:solidFill>
                 <a:latin typeface="Roboto"/>
               </a:rPr>
-              <a:t>28.4%</a:t>
+              <a:t>36.1%</a:t>
             </a:r>
           </a:p>
         </p:txBody>
@@ -8251,7 +8251,7 @@
                 </a:solidFill>
                 <a:latin typeface="Roboto"/>
               </a:rPr>
-              <a:t>$287,262 before overheads</a:t>
+              <a:t>$408,562 before overheads</a:t>
             </a:r>
           </a:p>
         </p:txBody>
@@ -8266,7 +8266,7 @@
         </p:nvGraphicFramePr>
         <p:xfrm>
           <a:off x="457200" y="2604516"/>
-          <a:ext cx="11277295" cy="2516124"/>
+          <a:ext cx="11277295" cy="2714244"/>
         </p:xfrm>
         <a:graphic>
           <a:graphicData uri="http://schemas.openxmlformats.org/drawingml/2006/chart">
@@ -8282,8 +8282,8 @@
         </p:nvSpPr>
         <p:spPr>
           <a:xfrm>
-            <a:off x="457200" y="5212080"/>
-            <a:ext cx="5501487" cy="1097280"/>
+            <a:off x="457200" y="5410200"/>
+            <a:ext cx="5501487" cy="899160"/>
           </a:xfrm>
           <a:prstGeom prst="rect">
             <a:avLst/>
@@ -8331,7 +8331,7 @@
         </p:nvSpPr>
         <p:spPr>
           <a:xfrm>
-            <a:off x="594360" y="5266944"/>
+            <a:off x="594360" y="5465064"/>
             <a:ext cx="5227167" cy="274320"/>
           </a:xfrm>
           <a:prstGeom prst="rect">
@@ -8370,8 +8370,8 @@
         </p:nvSpPr>
         <p:spPr>
           <a:xfrm>
-            <a:off x="594360" y="5541264"/>
-            <a:ext cx="5227167" cy="731520"/>
+            <a:off x="594360" y="5739384"/>
+            <a:ext cx="5227167" cy="533400"/>
           </a:xfrm>
           <a:prstGeom prst="rect">
             <a:avLst/>
@@ -8396,7 +8396,7 @@
                 </a:solidFill>
                 <a:latin typeface="Roboto"/>
               </a:rPr>
-              <a:t>Installations brought in $1,011,500 this financial year to date, at a 28.4% gross margin (below the 37.6% overall).</a:t>
+              <a:t>Installations brought in $1,132,800 this financial year to date, at a 36.1% gross margin (below the 44.0% overall).</a:t>
             </a:r>
           </a:p>
         </p:txBody>
@@ -8409,8 +8409,8 @@
         </p:nvSpPr>
         <p:spPr>
           <a:xfrm>
-            <a:off x="6233007" y="5212080"/>
-            <a:ext cx="5501487" cy="1097280"/>
+            <a:off x="6233007" y="5410200"/>
+            <a:ext cx="5501487" cy="899160"/>
           </a:xfrm>
           <a:prstGeom prst="rect">
             <a:avLst/>
@@ -8458,7 +8458,7 @@
         </p:nvSpPr>
         <p:spPr>
           <a:xfrm>
-            <a:off x="6370167" y="5266944"/>
+            <a:off x="6370167" y="5465064"/>
             <a:ext cx="5227167" cy="274320"/>
           </a:xfrm>
           <a:prstGeom prst="rect">
@@ -8497,8 +8497,8 @@
         </p:nvSpPr>
         <p:spPr>
           <a:xfrm>
-            <a:off x="6370167" y="5541264"/>
-            <a:ext cx="5227167" cy="731520"/>
+            <a:off x="6370167" y="5739384"/>
+            <a:ext cx="5227167" cy="533400"/>
           </a:xfrm>
           <a:prstGeom prst="rect">
             <a:avLst/>
@@ -8523,7 +8523,7 @@
                 </a:solidFill>
                 <a:latin typeface="Roboto"/>
               </a:rPr>
-              <a:t>Installations: 28.4% gross margin, 6.6 points under the 35.0% target: about $66,763 on $1,011,500 of revenue this financial year to date. It's below the 39.8% needed to cover overheads, too.</a:t>
+              <a:t>Installations: 36.1% gross margin, 1.1 points over the 35.0% target ($12,082 ahead on $1,132,800 this financial year to date).</a:t>
             </a:r>
           </a:p>
         </p:txBody>
@@ -8601,7 +8601,7 @@
                 </a:solidFill>
                 <a:latin typeface="Roboto"/>
               </a:rPr>
-              <a:t>Data retrieved 2pm, Tue 6 Oct 2026 · Generated 8 Oct 2026, 9:35am · Sample data · Made with Python (python-pptx)</a:t>
+              <a:t>Data retrieved 2pm, Tue 6 Oct 2026 · Generated 9 Oct 2026, 8:41am · Sample data · Made with Python (python-pptx)</a:t>
             </a:r>
           </a:p>
         </p:txBody>
@@ -8947,7 +8947,7 @@
                 </a:solidFill>
                 <a:latin typeface="Roboto"/>
               </a:rPr>
-              <a:t>5.5%</a:t>
+              <a:t>5.9%</a:t>
             </a:r>
           </a:p>
         </p:txBody>
@@ -8986,7 +8986,7 @@
                 </a:solidFill>
                 <a:latin typeface="Roboto"/>
               </a:rPr>
-              <a:t>$23,087 against $21,875</a:t>
+              <a:t>$25,067 against $23,665</a:t>
             </a:r>
           </a:p>
         </p:txBody>
@@ -9113,7 +9113,7 @@
                 </a:solidFill>
                 <a:latin typeface="Roboto"/>
               </a:rPr>
-              <a:t>$243,781</a:t>
+              <a:t>$264,557</a:t>
             </a:r>
           </a:p>
         </p:txBody>
@@ -9279,7 +9279,7 @@
                 </a:solidFill>
                 <a:latin typeface="Roboto"/>
               </a:rPr>
-              <a:t>43.7%</a:t>
+              <a:t>48.1%</a:t>
             </a:r>
           </a:p>
         </p:txBody>
@@ -9318,7 +9318,7 @@
                 </a:solidFill>
                 <a:latin typeface="Roboto"/>
               </a:rPr>
-              <a:t>$106,499 before overheads</a:t>
+              <a:t>$127,275 before overheads</a:t>
             </a:r>
           </a:p>
         </p:txBody>
@@ -9463,7 +9463,7 @@
                 </a:solidFill>
                 <a:latin typeface="Roboto"/>
               </a:rPr>
-              <a:t>Call-outs and repairs brought in $243,781 this financial year to date, at a 43.7% gross margin (above the 37.6% overall).</a:t>
+              <a:t>Call-outs and repairs brought in $264,557 this financial year to date, at a 48.1% gross margin (above the 44.0% overall).</a:t>
             </a:r>
           </a:p>
         </p:txBody>
@@ -9590,7 +9590,7 @@
                 </a:solidFill>
                 <a:latin typeface="Roboto"/>
               </a:rPr>
-              <a:t>Call-outs and repairs: 43.7% gross margin, 8.7 points over the 35.0% target ($21,176 ahead on $243,781 this financial year to date).</a:t>
+              <a:t>Call-outs and repairs: 48.1% gross margin, 13.1 points over the 35.0% target ($34,680 ahead on $264,557 this financial year to date).</a:t>
             </a:r>
           </a:p>
         </p:txBody>
@@ -9668,7 +9668,7 @@
                 </a:solidFill>
                 <a:latin typeface="Roboto"/>
               </a:rPr>
-              <a:t>Data retrieved 2pm, Tue 6 Oct 2026 · Generated 8 Oct 2026, 9:35am · Sample data · Made with Python (python-pptx)</a:t>
+              <a:t>Data retrieved 2pm, Tue 6 Oct 2026 · Generated 9 Oct 2026, 8:41am · Sample data · Made with Python (python-pptx)</a:t>
             </a:r>
           </a:p>
         </p:txBody>
@@ -9887,7 +9887,7 @@
                 </a:solidFill>
                 <a:latin typeface="Roboto"/>
               </a:rPr>
-              <a:t>Same period last year: Not available: the data starts October 2024. From gross margin to profit: April's jobs made $68,843 gross margin (41.7%). Technician time not charged to jobs took $6,456 and overheads $59,290, leaving $3,097 profit before tax (1.9% of revenue). To cover overheads, jobs need a 39.8% gross margin on average.</a:t>
+              <a:t>Same period last year: Not available: the data starts October 2024. From gross margin to profit: April's jobs made $87,823 gross margin (47.7%). Technician time not charged to jobs took $24,208 and overheads $59,290, leaving $4,325 profit before tax (2.4% of revenue). To cover overheads, jobs need a 45.4% gross margin on average.</a:t>
             </a:r>
           </a:p>
         </p:txBody>
@@ -10118,7 +10118,7 @@
                           </a:solidFill>
                           <a:latin typeface="Roboto"/>
                         </a:rPr>
-                        <a:t>$355,300</a:t>
+                        <a:t>$398,000</a:t>
                       </a:r>
                     </a:p>
                   </a:txBody>
@@ -10199,7 +10199,7 @@
                           </a:solidFill>
                           <a:latin typeface="Roboto"/>
                         </a:rPr>
-                        <a:t>$211,424</a:t>
+                        <a:t>$254,124</a:t>
                       </a:r>
                     </a:p>
                   </a:txBody>
@@ -10226,7 +10226,7 @@
                           </a:solidFill>
                           <a:latin typeface="Roboto"/>
                         </a:rPr>
-                        <a:t>59.5%</a:t>
+                        <a:t>63.9%</a:t>
                       </a:r>
                     </a:p>
                   </a:txBody>
@@ -10282,7 +10282,7 @@
                           </a:solidFill>
                           <a:latin typeface="Roboto"/>
                         </a:rPr>
-                        <a:t>$1,011,500</a:t>
+                        <a:t>$1,132,800</a:t>
                       </a:r>
                     </a:p>
                   </a:txBody>
@@ -10363,7 +10363,7 @@
                           </a:solidFill>
                           <a:latin typeface="Roboto"/>
                         </a:rPr>
-                        <a:t>$287,262</a:t>
+                        <a:t>$408,562</a:t>
                       </a:r>
                     </a:p>
                   </a:txBody>
@@ -10390,7 +10390,7 @@
                           </a:solidFill>
                           <a:latin typeface="Roboto"/>
                         </a:rPr>
-                        <a:t>28.4%</a:t>
+                        <a:t>36.1%</a:t>
                       </a:r>
                     </a:p>
                   </a:txBody>
@@ -10446,7 +10446,7 @@
                           </a:solidFill>
                           <a:latin typeface="Roboto"/>
                         </a:rPr>
-                        <a:t>$243,781</a:t>
+                        <a:t>$264,557</a:t>
                       </a:r>
                     </a:p>
                   </a:txBody>
@@ -10527,7 +10527,7 @@
                           </a:solidFill>
                           <a:latin typeface="Roboto"/>
                         </a:rPr>
-                        <a:t>$106,499</a:t>
+                        <a:t>$127,275</a:t>
                       </a:r>
                     </a:p>
                   </a:txBody>
@@ -10554,7 +10554,7 @@
                           </a:solidFill>
                           <a:latin typeface="Roboto"/>
                         </a:rPr>
-                        <a:t>43.7%</a:t>
+                        <a:t>48.1%</a:t>
                       </a:r>
                     </a:p>
                   </a:txBody>
@@ -10610,7 +10610,7 @@
                           </a:solidFill>
                           <a:latin typeface="Roboto"/>
                         </a:rPr>
-                        <a:t>$1,610,581</a:t>
+                        <a:t>$1,795,357</a:t>
                       </a:r>
                     </a:p>
                   </a:txBody>
@@ -10691,7 +10691,7 @@
                           </a:solidFill>
                           <a:latin typeface="Roboto"/>
                         </a:rPr>
-                        <a:t>$605,185</a:t>
+                        <a:t>$789,961</a:t>
                       </a:r>
                     </a:p>
                   </a:txBody>
@@ -10718,7 +10718,7 @@
                           </a:solidFill>
                           <a:latin typeface="Roboto"/>
                         </a:rPr>
-                        <a:t>37.6%</a:t>
+                        <a:t>44.0%</a:t>
                       </a:r>
                     </a:p>
                   </a:txBody>
@@ -10806,7 +10806,7 @@
                 </a:solidFill>
                 <a:latin typeface="Roboto"/>
               </a:rPr>
-              <a:t>Data retrieved 2pm, Tue 6 Oct 2026 · Generated 8 Oct 2026, 9:35am · Sample data · Made with Python (python-pptx)</a:t>
+              <a:t>Data retrieved 2pm, Tue 6 Oct 2026 · Generated 9 Oct 2026, 8:41am · Sample data · Made with Python (python-pptx)</a:t>
             </a:r>
           </a:p>
         </p:txBody>
